--- a/deck/PharmaPulse.pptx
+++ b/deck/PharmaPulse.pptx
@@ -1136,7 +1136,7 @@
           <a:p>
             <a:r>
               <a:rPr lang="en-US" dirty="0"/>
-              <a:t>Three windows are in the product: Jan-Mar 2019 at 69.5%, Apr-Jun 2019 at 64.3%, Oct-Dec 2018 at 75.5%. Show a second one live so it is obviously not one cherry-picked quarter.</a:t>
+              <a:t>Do not lead on min/max - anyone who works in inventory discounts it instantly, because every ERP carries safety stock. Lead on the third card. If asked why we do not dominate the ERP column: every policy here sizes off a trailing window, so none of them can anticipate a seasonal turn - on 1 January the last 180 days are autumn. Anticipating it is what the forecast layer is for, and exercising it needs a forecast produced at each review point rather than one vintage. That is the next piece of work and it is written down.</a:t>
             </a:r>
             <a:endParaRPr lang="en-US" dirty="0"/>
           </a:p>
@@ -9650,7 +9650,7 @@
         <p:spPr>
           <a:xfrm>
             <a:off x="777240" y="868680"/>
-            <a:ext cx="10637215" cy="1600200"/>
+            <a:ext cx="10637215" cy="1143000"/>
           </a:xfrm>
           <a:prstGeom prst="rect">
             <a:avLst/>
@@ -9664,12 +9664,12 @@
           <a:p>
             <a:pPr indent="0" marL="0">
               <a:lnSpc>
-                <a:spcPts val="3584"/>
+                <a:spcPts val="3360"/>
               </a:lnSpc>
               <a:buNone/>
             </a:pPr>
             <a:r>
-              <a:rPr lang="en-US" sz="3200" dirty="0">
+              <a:rPr lang="en-US" sz="3000" dirty="0">
                 <a:solidFill>
                   <a:srgbClr val="14110D"/>
                 </a:solidFill>
@@ -9677,19 +9677,19 @@
                 <a:ea typeface="Cambria" pitchFamily="34" charset="-122"/>
                 <a:cs typeface="Cambria" pitchFamily="34" charset="-120"/>
               </a:rPr>
-              <a:t>Replayed over the identical real days,</a:t>
-            </a:r>
-            <a:endParaRPr lang="en-US" sz="3200" dirty="0"/>
+              <a:t>Against four policies, including the two</a:t>
+            </a:r>
+            <a:endParaRPr lang="en-US" sz="3000" dirty="0"/>
           </a:p>
           <a:p>
             <a:pPr indent="0" marL="0">
               <a:lnSpc>
-                <a:spcPts val="3584"/>
+                <a:spcPts val="3360"/>
               </a:lnSpc>
               <a:buNone/>
             </a:pPr>
             <a:r>
-              <a:rPr lang="en-US" sz="3200" dirty="0">
+              <a:rPr lang="en-US" sz="3000" dirty="0">
                 <a:solidFill>
                   <a:srgbClr val="14110D"/>
                 </a:solidFill>
@@ -9697,113 +9697,816 @@
                 <a:ea typeface="Cambria" pitchFamily="34" charset="-122"/>
                 <a:cs typeface="Cambria" pitchFamily="34" charset="-120"/>
               </a:rPr>
-              <a:t>with identical costs.</a:t>
-            </a:r>
-            <a:endParaRPr lang="en-US" sz="3200" dirty="0"/>
-          </a:p>
-        </p:txBody>
-      </p:sp>
-      <p:sp>
-        <p:nvSpPr>
-          <p:cNvPr id="4" name="Shape 2"/>
+              <a:t>that are hard to beat.</a:t>
+            </a:r>
+            <a:endParaRPr lang="en-US" sz="3000" dirty="0"/>
+          </a:p>
+        </p:txBody>
+      </p:sp>
+      <p:sp>
+        <p:nvSpPr>
+          <p:cNvPr id="4" name="Text 2"/>
+          <p:cNvSpPr txBox="1"/>
+          <p:nvPr/>
+        </p:nvSpPr>
+        <p:spPr>
+          <a:xfrm>
+            <a:off x="777240" y="2084832"/>
+            <a:ext cx="10637215" cy="640080"/>
+          </a:xfrm>
+          <a:prstGeom prst="rect">
+            <a:avLst/>
+          </a:prstGeom>
+          <a:noFill/>
+          <a:ln/>
+        </p:spPr>
+        <p:txBody>
+          <a:bodyPr wrap="square" lIns="0" tIns="0" rIns="0" bIns="0" rtlCol="0" anchor="ctr"/>
+          <a:lstStyle/>
+          <a:p>
+            <a:pPr indent="0" marL="0">
+              <a:lnSpc>
+                <a:spcPts val="1700"/>
+              </a:lnSpc>
+              <a:buNone/>
+            </a:pPr>
+            <a:r>
+              <a:rPr lang="en-US" sz="1250" dirty="0">
+                <a:solidFill>
+                  <a:srgbClr val="3B362F"/>
+                </a:solidFill>
+                <a:latin typeface="Calibri" pitchFamily="34" charset="0"/>
+                <a:ea typeface="Calibri" pitchFamily="34" charset="-122"/>
+                <a:cs typeface="Calibri" pitchFamily="34" charset="-120"/>
+              </a:rPr>
+              <a:t>Every policy sizes off the same trailing window of real sales, so the only thing being compared is how the quantity is chosen. The rung that carries the claim is the third one: it gets our forecast and our service level, and differs in exactly one thing — it sizes with a normal approximation instead of reading the quantile off the calibrated distribution.</a:t>
+            </a:r>
+            <a:endParaRPr lang="en-US" sz="1250" dirty="0"/>
+          </a:p>
+        </p:txBody>
+      </p:sp>
+      <p:sp>
+        <p:nvSpPr>
+          <p:cNvPr id="5" name="Shape 3"/>
           <p:cNvSpPr/>
           <p:nvPr/>
         </p:nvSpPr>
         <p:spPr>
           <a:xfrm>
-            <a:off x="731520" y="2286000"/>
-            <a:ext cx="10725912" cy="3081528"/>
+            <a:off x="777240" y="2880360"/>
+            <a:ext cx="3362858" cy="2286000"/>
           </a:xfrm>
           <a:prstGeom prst="rect">
             <a:avLst/>
           </a:prstGeom>
           <a:solidFill>
-            <a:srgbClr val="EFEBE2"/>
+            <a:srgbClr val="FCFAF6"/>
           </a:solidFill>
-          <a:ln w="15875">
+          <a:ln w="12700">
             <a:solidFill>
-              <a:srgbClr val="14110D"/>
+              <a:srgbClr val="E4DFD5"/>
             </a:solidFill>
             <a:prstDash val="solid"/>
           </a:ln>
         </p:spPr>
       </p:sp>
-      <p:pic>
-        <p:nvPicPr>
-          <p:cNvPr id="5" name="Image 0" descr="C:\Users\ASUS\Desktop\CS\Projects\pharmapulse\deck\img\liveops_case.png">    </p:cNvPr>
-          <p:cNvPicPr>
-            <a:picLocks noChangeAspect="1"/>
-          </p:cNvPicPr>
-          <p:nvPr/>
-        </p:nvPicPr>
-        <p:blipFill>
-          <a:blip r:embed="rId1"/>
-          <a:stretch>
-            <a:fillRect/>
-          </a:stretch>
-        </p:blipFill>
-        <p:spPr>
-          <a:xfrm>
-            <a:off x="777240" y="2331720"/>
-            <a:ext cx="10634472" cy="2990088"/>
-          </a:xfrm>
-          <a:prstGeom prst="rect">
-            <a:avLst/>
-          </a:prstGeom>
-        </p:spPr>
-      </p:pic>
-      <p:sp>
-        <p:nvSpPr>
-          <p:cNvPr id="6" name="Text 3"/>
-          <p:cNvSpPr txBox="1"/>
-          <p:nvPr/>
-        </p:nvSpPr>
-        <p:spPr>
-          <a:xfrm>
-            <a:off x="777240" y="5486400"/>
-            <a:ext cx="6858000" cy="777240"/>
-          </a:xfrm>
-          <a:prstGeom prst="rect">
-            <a:avLst/>
-          </a:prstGeom>
-          <a:noFill/>
-          <a:ln/>
-        </p:spPr>
-        <p:txBody>
-          <a:bodyPr wrap="square" lIns="0" tIns="0" rIns="0" bIns="0" rtlCol="0" anchor="ctr"/>
-          <a:lstStyle/>
-          <a:p>
-            <a:pPr indent="0" marL="0">
-              <a:lnSpc>
-                <a:spcPts val="1800"/>
-              </a:lnSpc>
-              <a:buNone/>
-            </a:pPr>
-            <a:r>
-              <a:rPr lang="en-US" sz="1250" dirty="0">
-                <a:solidFill>
-                  <a:srgbClr val="3B362F"/>
-                </a:solidFill>
-                <a:latin typeface="Calibri" pitchFamily="34" charset="0"/>
-                <a:ea typeface="Calibri" pitchFamily="34" charset="-122"/>
-                <a:cs typeface="Calibri" pitchFamily="34" charset="-120"/>
-              </a:rPr>
-              <a:t>The only difference between the two policies is that min/max sizes against the mean, and we size against the quantile the cost ratio implies. Same lead time, same review cadence, same protection interval, same 90 real days of history.</a:t>
-            </a:r>
-            <a:endParaRPr lang="en-US" sz="1250" dirty="0"/>
-          </a:p>
-        </p:txBody>
-      </p:sp>
-      <p:sp>
-        <p:nvSpPr>
-          <p:cNvPr id="7" name="Shape 4"/>
+      <p:sp>
+        <p:nvSpPr>
+          <p:cNvPr id="6" name="Text 4"/>
+          <p:cNvSpPr txBox="1"/>
+          <p:nvPr/>
+        </p:nvSpPr>
+        <p:spPr>
+          <a:xfrm>
+            <a:off x="1005840" y="3035808"/>
+            <a:ext cx="2905658" cy="292608"/>
+          </a:xfrm>
+          <a:prstGeom prst="rect">
+            <a:avLst/>
+          </a:prstGeom>
+          <a:noFill/>
+          <a:ln/>
+        </p:spPr>
+        <p:txBody>
+          <a:bodyPr wrap="square" lIns="0" tIns="0" rIns="0" bIns="0" rtlCol="0" anchor="ctr"/>
+          <a:lstStyle/>
+          <a:p>
+            <a:pPr indent="0" marL="0">
+              <a:buNone/>
+            </a:pPr>
+            <a:r>
+              <a:rPr lang="en-US" sz="1350" b="1" dirty="0">
+                <a:solidFill>
+                  <a:srgbClr val="14110D"/>
+                </a:solidFill>
+                <a:latin typeface="Calibri" pitchFamily="34" charset="0"/>
+                <a:ea typeface="Calibri" pitchFamily="34" charset="-122"/>
+                <a:cs typeface="Calibri" pitchFamily="34" charset="-120"/>
+              </a:rPr>
+              <a:t>Min/max on the mean</a:t>
+            </a:r>
+            <a:endParaRPr lang="en-US" sz="1350" dirty="0"/>
+          </a:p>
+        </p:txBody>
+      </p:sp>
+      <p:sp>
+        <p:nvSpPr>
+          <p:cNvPr id="7" name="Text 5"/>
+          <p:cNvSpPr txBox="1"/>
+          <p:nvPr/>
+        </p:nvSpPr>
+        <p:spPr>
+          <a:xfrm>
+            <a:off x="1005840" y="3319272"/>
+            <a:ext cx="2905658" cy="237744"/>
+          </a:xfrm>
+          <a:prstGeom prst="rect">
+            <a:avLst/>
+          </a:prstGeom>
+          <a:noFill/>
+          <a:ln/>
+        </p:spPr>
+        <p:txBody>
+          <a:bodyPr wrap="square" lIns="0" tIns="0" rIns="0" bIns="0" rtlCol="0" anchor="ctr"/>
+          <a:lstStyle/>
+          <a:p>
+            <a:pPr indent="0" marL="0">
+              <a:buNone/>
+            </a:pPr>
+            <a:r>
+              <a:rPr lang="en-US" sz="950" dirty="0">
+                <a:solidFill>
+                  <a:srgbClr val="9A9287"/>
+                </a:solidFill>
+                <a:latin typeface="Courier New" pitchFamily="34" charset="0"/>
+                <a:ea typeface="Courier New" pitchFamily="34" charset="-122"/>
+                <a:cs typeface="Courier New" pitchFamily="34" charset="-120"/>
+              </a:rPr>
+              <a:t>no system at all</a:t>
+            </a:r>
+            <a:endParaRPr lang="en-US" sz="950" dirty="0"/>
+          </a:p>
+        </p:txBody>
+      </p:sp>
+      <p:sp>
+        <p:nvSpPr>
+          <p:cNvPr id="8" name="Text 6"/>
+          <p:cNvSpPr txBox="1"/>
+          <p:nvPr/>
+        </p:nvSpPr>
+        <p:spPr>
+          <a:xfrm>
+            <a:off x="1005840" y="3657600"/>
+            <a:ext cx="1554480" cy="274320"/>
+          </a:xfrm>
+          <a:prstGeom prst="rect">
+            <a:avLst/>
+          </a:prstGeom>
+          <a:noFill/>
+          <a:ln/>
+        </p:spPr>
+        <p:txBody>
+          <a:bodyPr wrap="square" lIns="0" tIns="0" rIns="0" bIns="0" rtlCol="0" anchor="ctr"/>
+          <a:lstStyle/>
+          <a:p>
+            <a:pPr indent="0" marL="0">
+              <a:buNone/>
+            </a:pPr>
+            <a:r>
+              <a:rPr lang="en-US" sz="1100" dirty="0">
+                <a:solidFill>
+                  <a:srgbClr val="6B6459"/>
+                </a:solidFill>
+                <a:latin typeface="Calibri" pitchFamily="34" charset="0"/>
+                <a:ea typeface="Calibri" pitchFamily="34" charset="-122"/>
+                <a:cs typeface="Calibri" pitchFamily="34" charset="-120"/>
+              </a:rPr>
+              <a:t>Jan–Mar 19</a:t>
+            </a:r>
+            <a:endParaRPr lang="en-US" sz="1100" dirty="0"/>
+          </a:p>
+        </p:txBody>
+      </p:sp>
+      <p:sp>
+        <p:nvSpPr>
+          <p:cNvPr id="9" name="Text 7"/>
+          <p:cNvSpPr txBox="1"/>
+          <p:nvPr/>
+        </p:nvSpPr>
+        <p:spPr>
+          <a:xfrm>
+            <a:off x="2560320" y="3657600"/>
+            <a:ext cx="1188720" cy="274320"/>
+          </a:xfrm>
+          <a:prstGeom prst="rect">
+            <a:avLst/>
+          </a:prstGeom>
+          <a:noFill/>
+          <a:ln/>
+        </p:spPr>
+        <p:txBody>
+          <a:bodyPr wrap="square" lIns="0" tIns="0" rIns="0" bIns="0" rtlCol="0" anchor="ctr"/>
+          <a:lstStyle/>
+          <a:p>
+            <a:pPr algn="r" indent="0" marL="0">
+              <a:buNone/>
+            </a:pPr>
+            <a:r>
+              <a:rPr lang="en-US" sz="1300" b="1" dirty="0">
+                <a:solidFill>
+                  <a:srgbClr val="1F5D42"/>
+                </a:solidFill>
+                <a:latin typeface="Courier New" pitchFamily="34" charset="0"/>
+                <a:ea typeface="Courier New" pitchFamily="34" charset="-122"/>
+                <a:cs typeface="Courier New" pitchFamily="34" charset="-120"/>
+              </a:rPr>
+              <a:t>+6.0%</a:t>
+            </a:r>
+            <a:endParaRPr lang="en-US" sz="1300" dirty="0"/>
+          </a:p>
+        </p:txBody>
+      </p:sp>
+      <p:sp>
+        <p:nvSpPr>
+          <p:cNvPr id="10" name="Text 8"/>
+          <p:cNvSpPr txBox="1"/>
+          <p:nvPr/>
+        </p:nvSpPr>
+        <p:spPr>
+          <a:xfrm>
+            <a:off x="1005840" y="4114800"/>
+            <a:ext cx="1554480" cy="274320"/>
+          </a:xfrm>
+          <a:prstGeom prst="rect">
+            <a:avLst/>
+          </a:prstGeom>
+          <a:noFill/>
+          <a:ln/>
+        </p:spPr>
+        <p:txBody>
+          <a:bodyPr wrap="square" lIns="0" tIns="0" rIns="0" bIns="0" rtlCol="0" anchor="ctr"/>
+          <a:lstStyle/>
+          <a:p>
+            <a:pPr indent="0" marL="0">
+              <a:buNone/>
+            </a:pPr>
+            <a:r>
+              <a:rPr lang="en-US" sz="1100" dirty="0">
+                <a:solidFill>
+                  <a:srgbClr val="6B6459"/>
+                </a:solidFill>
+                <a:latin typeface="Calibri" pitchFamily="34" charset="0"/>
+                <a:ea typeface="Calibri" pitchFamily="34" charset="-122"/>
+                <a:cs typeface="Calibri" pitchFamily="34" charset="-120"/>
+              </a:rPr>
+              <a:t>Apr–Jun 19</a:t>
+            </a:r>
+            <a:endParaRPr lang="en-US" sz="1100" dirty="0"/>
+          </a:p>
+        </p:txBody>
+      </p:sp>
+      <p:sp>
+        <p:nvSpPr>
+          <p:cNvPr id="11" name="Text 9"/>
+          <p:cNvSpPr txBox="1"/>
+          <p:nvPr/>
+        </p:nvSpPr>
+        <p:spPr>
+          <a:xfrm>
+            <a:off x="2560320" y="4114800"/>
+            <a:ext cx="1188720" cy="274320"/>
+          </a:xfrm>
+          <a:prstGeom prst="rect">
+            <a:avLst/>
+          </a:prstGeom>
+          <a:noFill/>
+          <a:ln/>
+        </p:spPr>
+        <p:txBody>
+          <a:bodyPr wrap="square" lIns="0" tIns="0" rIns="0" bIns="0" rtlCol="0" anchor="ctr"/>
+          <a:lstStyle/>
+          <a:p>
+            <a:pPr algn="r" indent="0" marL="0">
+              <a:buNone/>
+            </a:pPr>
+            <a:r>
+              <a:rPr lang="en-US" sz="1300" b="1" dirty="0">
+                <a:solidFill>
+                  <a:srgbClr val="1F5D42"/>
+                </a:solidFill>
+                <a:latin typeface="Courier New" pitchFamily="34" charset="0"/>
+                <a:ea typeface="Courier New" pitchFamily="34" charset="-122"/>
+                <a:cs typeface="Courier New" pitchFamily="34" charset="-120"/>
+              </a:rPr>
+              <a:t>+48.8%</a:t>
+            </a:r>
+            <a:endParaRPr lang="en-US" sz="1300" dirty="0"/>
+          </a:p>
+        </p:txBody>
+      </p:sp>
+      <p:sp>
+        <p:nvSpPr>
+          <p:cNvPr id="12" name="Text 10"/>
+          <p:cNvSpPr txBox="1"/>
+          <p:nvPr/>
+        </p:nvSpPr>
+        <p:spPr>
+          <a:xfrm>
+            <a:off x="1005840" y="4572000"/>
+            <a:ext cx="1554480" cy="274320"/>
+          </a:xfrm>
+          <a:prstGeom prst="rect">
+            <a:avLst/>
+          </a:prstGeom>
+          <a:noFill/>
+          <a:ln/>
+        </p:spPr>
+        <p:txBody>
+          <a:bodyPr wrap="square" lIns="0" tIns="0" rIns="0" bIns="0" rtlCol="0" anchor="ctr"/>
+          <a:lstStyle/>
+          <a:p>
+            <a:pPr indent="0" marL="0">
+              <a:buNone/>
+            </a:pPr>
+            <a:r>
+              <a:rPr lang="en-US" sz="1100" dirty="0">
+                <a:solidFill>
+                  <a:srgbClr val="6B6459"/>
+                </a:solidFill>
+                <a:latin typeface="Calibri" pitchFamily="34" charset="0"/>
+                <a:ea typeface="Calibri" pitchFamily="34" charset="-122"/>
+                <a:cs typeface="Calibri" pitchFamily="34" charset="-120"/>
+              </a:rPr>
+              <a:t>Oct–Dec 18</a:t>
+            </a:r>
+            <a:endParaRPr lang="en-US" sz="1100" dirty="0"/>
+          </a:p>
+        </p:txBody>
+      </p:sp>
+      <p:sp>
+        <p:nvSpPr>
+          <p:cNvPr id="13" name="Text 11"/>
+          <p:cNvSpPr txBox="1"/>
+          <p:nvPr/>
+        </p:nvSpPr>
+        <p:spPr>
+          <a:xfrm>
+            <a:off x="2560320" y="4572000"/>
+            <a:ext cx="1188720" cy="274320"/>
+          </a:xfrm>
+          <a:prstGeom prst="rect">
+            <a:avLst/>
+          </a:prstGeom>
+          <a:noFill/>
+          <a:ln/>
+        </p:spPr>
+        <p:txBody>
+          <a:bodyPr wrap="square" lIns="0" tIns="0" rIns="0" bIns="0" rtlCol="0" anchor="ctr"/>
+          <a:lstStyle/>
+          <a:p>
+            <a:pPr algn="r" indent="0" marL="0">
+              <a:buNone/>
+            </a:pPr>
+            <a:r>
+              <a:rPr lang="en-US" sz="1300" b="1" dirty="0">
+                <a:solidFill>
+                  <a:srgbClr val="1F5D42"/>
+                </a:solidFill>
+                <a:latin typeface="Courier New" pitchFamily="34" charset="0"/>
+                <a:ea typeface="Courier New" pitchFamily="34" charset="-122"/>
+                <a:cs typeface="Courier New" pitchFamily="34" charset="-120"/>
+              </a:rPr>
+              <a:t>+61.1%</a:t>
+            </a:r>
+            <a:endParaRPr lang="en-US" sz="1300" dirty="0"/>
+          </a:p>
+        </p:txBody>
+      </p:sp>
+      <p:sp>
+        <p:nvSpPr>
+          <p:cNvPr id="14" name="Text 12"/>
+          <p:cNvSpPr txBox="1"/>
+          <p:nvPr/>
+        </p:nvSpPr>
+        <p:spPr>
+          <a:xfrm>
+            <a:off x="1005840" y="4828032"/>
+            <a:ext cx="2905658" cy="237744"/>
+          </a:xfrm>
+          <a:prstGeom prst="rect">
+            <a:avLst/>
+          </a:prstGeom>
+          <a:noFill/>
+          <a:ln/>
+        </p:spPr>
+        <p:txBody>
+          <a:bodyPr wrap="square" lIns="0" tIns="0" rIns="0" bIns="0" rtlCol="0" anchor="ctr"/>
+          <a:lstStyle/>
+          <a:p>
+            <a:pPr indent="0" marL="0">
+              <a:buNone/>
+            </a:pPr>
+            <a:r>
+              <a:rPr lang="en-US" sz="1050" i="1" dirty="0">
+                <a:solidFill>
+                  <a:srgbClr val="1F5D42"/>
+                </a:solidFill>
+                <a:latin typeface="Calibri" pitchFamily="34" charset="0"/>
+                <a:ea typeface="Calibri" pitchFamily="34" charset="-122"/>
+                <a:cs typeface="Calibri" pitchFamily="34" charset="-120"/>
+              </a:rPr>
+              <a:t>we win all three</a:t>
+            </a:r>
+            <a:endParaRPr lang="en-US" sz="1050" dirty="0"/>
+          </a:p>
+        </p:txBody>
+      </p:sp>
+      <p:sp>
+        <p:nvSpPr>
+          <p:cNvPr id="15" name="Shape 13"/>
           <p:cNvSpPr/>
           <p:nvPr/>
         </p:nvSpPr>
         <p:spPr>
           <a:xfrm>
-            <a:off x="7863840" y="5468112"/>
-            <a:ext cx="3566160" cy="822960"/>
+            <a:off x="4414418" y="2880360"/>
+            <a:ext cx="3362858" cy="2286000"/>
+          </a:xfrm>
+          <a:prstGeom prst="rect">
+            <a:avLst/>
+          </a:prstGeom>
+          <a:solidFill>
+            <a:srgbClr val="FCFAF6"/>
+          </a:solidFill>
+          <a:ln w="12700">
+            <a:solidFill>
+              <a:srgbClr val="E4DFD5"/>
+            </a:solidFill>
+            <a:prstDash val="solid"/>
+          </a:ln>
+        </p:spPr>
+      </p:sp>
+      <p:sp>
+        <p:nvSpPr>
+          <p:cNvPr id="16" name="Text 14"/>
+          <p:cNvSpPr txBox="1"/>
+          <p:nvPr/>
+        </p:nvSpPr>
+        <p:spPr>
+          <a:xfrm>
+            <a:off x="4643018" y="3035808"/>
+            <a:ext cx="2905658" cy="292608"/>
+          </a:xfrm>
+          <a:prstGeom prst="rect">
+            <a:avLst/>
+          </a:prstGeom>
+          <a:noFill/>
+          <a:ln/>
+        </p:spPr>
+        <p:txBody>
+          <a:bodyPr wrap="square" lIns="0" tIns="0" rIns="0" bIns="0" rtlCol="0" anchor="ctr"/>
+          <a:lstStyle/>
+          <a:p>
+            <a:pPr indent="0" marL="0">
+              <a:buNone/>
+            </a:pPr>
+            <a:r>
+              <a:rPr lang="en-US" sz="1350" b="1" dirty="0">
+                <a:solidFill>
+                  <a:srgbClr val="14110D"/>
+                </a:solidFill>
+                <a:latin typeface="Calibri" pitchFamily="34" charset="0"/>
+                <a:ea typeface="Calibri" pitchFamily="34" charset="-122"/>
+                <a:cs typeface="Calibri" pitchFamily="34" charset="-120"/>
+              </a:rPr>
+              <a:t>(s, S) safety stock</a:t>
+            </a:r>
+            <a:endParaRPr lang="en-US" sz="1350" dirty="0"/>
+          </a:p>
+        </p:txBody>
+      </p:sp>
+      <p:sp>
+        <p:nvSpPr>
+          <p:cNvPr id="17" name="Text 15"/>
+          <p:cNvSpPr txBox="1"/>
+          <p:nvPr/>
+        </p:nvSpPr>
+        <p:spPr>
+          <a:xfrm>
+            <a:off x="4643018" y="3319272"/>
+            <a:ext cx="2905658" cy="237744"/>
+          </a:xfrm>
+          <a:prstGeom prst="rect">
+            <a:avLst/>
+          </a:prstGeom>
+          <a:noFill/>
+          <a:ln/>
+        </p:spPr>
+        <p:txBody>
+          <a:bodyPr wrap="square" lIns="0" tIns="0" rIns="0" bIns="0" rtlCol="0" anchor="ctr"/>
+          <a:lstStyle/>
+          <a:p>
+            <a:pPr indent="0" marL="0">
+              <a:buNone/>
+            </a:pPr>
+            <a:r>
+              <a:rPr lang="en-US" sz="950" dirty="0">
+                <a:solidFill>
+                  <a:srgbClr val="9A9287"/>
+                </a:solidFill>
+                <a:latin typeface="Courier New" pitchFamily="34" charset="0"/>
+                <a:ea typeface="Courier New" pitchFamily="34" charset="-122"/>
+                <a:cs typeface="Courier New" pitchFamily="34" charset="-120"/>
+              </a:rPr>
+              <a:t>what an ERP does</a:t>
+            </a:r>
+            <a:endParaRPr lang="en-US" sz="950" dirty="0"/>
+          </a:p>
+        </p:txBody>
+      </p:sp>
+      <p:sp>
+        <p:nvSpPr>
+          <p:cNvPr id="18" name="Text 16"/>
+          <p:cNvSpPr txBox="1"/>
+          <p:nvPr/>
+        </p:nvSpPr>
+        <p:spPr>
+          <a:xfrm>
+            <a:off x="4643018" y="3657600"/>
+            <a:ext cx="1554480" cy="274320"/>
+          </a:xfrm>
+          <a:prstGeom prst="rect">
+            <a:avLst/>
+          </a:prstGeom>
+          <a:noFill/>
+          <a:ln/>
+        </p:spPr>
+        <p:txBody>
+          <a:bodyPr wrap="square" lIns="0" tIns="0" rIns="0" bIns="0" rtlCol="0" anchor="ctr"/>
+          <a:lstStyle/>
+          <a:p>
+            <a:pPr indent="0" marL="0">
+              <a:buNone/>
+            </a:pPr>
+            <a:r>
+              <a:rPr lang="en-US" sz="1100" dirty="0">
+                <a:solidFill>
+                  <a:srgbClr val="6B6459"/>
+                </a:solidFill>
+                <a:latin typeface="Calibri" pitchFamily="34" charset="0"/>
+                <a:ea typeface="Calibri" pitchFamily="34" charset="-122"/>
+                <a:cs typeface="Calibri" pitchFamily="34" charset="-120"/>
+              </a:rPr>
+              <a:t>Jan–Mar 19</a:t>
+            </a:r>
+            <a:endParaRPr lang="en-US" sz="1100" dirty="0"/>
+          </a:p>
+        </p:txBody>
+      </p:sp>
+      <p:sp>
+        <p:nvSpPr>
+          <p:cNvPr id="19" name="Text 17"/>
+          <p:cNvSpPr txBox="1"/>
+          <p:nvPr/>
+        </p:nvSpPr>
+        <p:spPr>
+          <a:xfrm>
+            <a:off x="6197498" y="3657600"/>
+            <a:ext cx="1188720" cy="274320"/>
+          </a:xfrm>
+          <a:prstGeom prst="rect">
+            <a:avLst/>
+          </a:prstGeom>
+          <a:noFill/>
+          <a:ln/>
+        </p:spPr>
+        <p:txBody>
+          <a:bodyPr wrap="square" lIns="0" tIns="0" rIns="0" bIns="0" rtlCol="0" anchor="ctr"/>
+          <a:lstStyle/>
+          <a:p>
+            <a:pPr algn="r" indent="0" marL="0">
+              <a:buNone/>
+            </a:pPr>
+            <a:r>
+              <a:rPr lang="en-US" sz="1300" b="1" dirty="0">
+                <a:solidFill>
+                  <a:srgbClr val="8A6410"/>
+                </a:solidFill>
+                <a:latin typeface="Courier New" pitchFamily="34" charset="0"/>
+                <a:ea typeface="Courier New" pitchFamily="34" charset="-122"/>
+                <a:cs typeface="Courier New" pitchFamily="34" charset="-120"/>
+              </a:rPr>
+              <a:t>-2.9%</a:t>
+            </a:r>
+            <a:endParaRPr lang="en-US" sz="1300" dirty="0"/>
+          </a:p>
+        </p:txBody>
+      </p:sp>
+      <p:sp>
+        <p:nvSpPr>
+          <p:cNvPr id="20" name="Text 18"/>
+          <p:cNvSpPr txBox="1"/>
+          <p:nvPr/>
+        </p:nvSpPr>
+        <p:spPr>
+          <a:xfrm>
+            <a:off x="4643018" y="4114800"/>
+            <a:ext cx="1554480" cy="274320"/>
+          </a:xfrm>
+          <a:prstGeom prst="rect">
+            <a:avLst/>
+          </a:prstGeom>
+          <a:noFill/>
+          <a:ln/>
+        </p:spPr>
+        <p:txBody>
+          <a:bodyPr wrap="square" lIns="0" tIns="0" rIns="0" bIns="0" rtlCol="0" anchor="ctr"/>
+          <a:lstStyle/>
+          <a:p>
+            <a:pPr indent="0" marL="0">
+              <a:buNone/>
+            </a:pPr>
+            <a:r>
+              <a:rPr lang="en-US" sz="1100" dirty="0">
+                <a:solidFill>
+                  <a:srgbClr val="6B6459"/>
+                </a:solidFill>
+                <a:latin typeface="Calibri" pitchFamily="34" charset="0"/>
+                <a:ea typeface="Calibri" pitchFamily="34" charset="-122"/>
+                <a:cs typeface="Calibri" pitchFamily="34" charset="-120"/>
+              </a:rPr>
+              <a:t>Apr–Jun 19</a:t>
+            </a:r>
+            <a:endParaRPr lang="en-US" sz="1100" dirty="0"/>
+          </a:p>
+        </p:txBody>
+      </p:sp>
+      <p:sp>
+        <p:nvSpPr>
+          <p:cNvPr id="21" name="Text 19"/>
+          <p:cNvSpPr txBox="1"/>
+          <p:nvPr/>
+        </p:nvSpPr>
+        <p:spPr>
+          <a:xfrm>
+            <a:off x="6197498" y="4114800"/>
+            <a:ext cx="1188720" cy="274320"/>
+          </a:xfrm>
+          <a:prstGeom prst="rect">
+            <a:avLst/>
+          </a:prstGeom>
+          <a:noFill/>
+          <a:ln/>
+        </p:spPr>
+        <p:txBody>
+          <a:bodyPr wrap="square" lIns="0" tIns="0" rIns="0" bIns="0" rtlCol="0" anchor="ctr"/>
+          <a:lstStyle/>
+          <a:p>
+            <a:pPr algn="r" indent="0" marL="0">
+              <a:buNone/>
+            </a:pPr>
+            <a:r>
+              <a:rPr lang="en-US" sz="1300" b="1" dirty="0">
+                <a:solidFill>
+                  <a:srgbClr val="1F5D42"/>
+                </a:solidFill>
+                <a:latin typeface="Courier New" pitchFamily="34" charset="0"/>
+                <a:ea typeface="Courier New" pitchFamily="34" charset="-122"/>
+                <a:cs typeface="Courier New" pitchFamily="34" charset="-120"/>
+              </a:rPr>
+              <a:t>+23.1%</a:t>
+            </a:r>
+            <a:endParaRPr lang="en-US" sz="1300" dirty="0"/>
+          </a:p>
+        </p:txBody>
+      </p:sp>
+      <p:sp>
+        <p:nvSpPr>
+          <p:cNvPr id="22" name="Text 20"/>
+          <p:cNvSpPr txBox="1"/>
+          <p:nvPr/>
+        </p:nvSpPr>
+        <p:spPr>
+          <a:xfrm>
+            <a:off x="4643018" y="4572000"/>
+            <a:ext cx="1554480" cy="274320"/>
+          </a:xfrm>
+          <a:prstGeom prst="rect">
+            <a:avLst/>
+          </a:prstGeom>
+          <a:noFill/>
+          <a:ln/>
+        </p:spPr>
+        <p:txBody>
+          <a:bodyPr wrap="square" lIns="0" tIns="0" rIns="0" bIns="0" rtlCol="0" anchor="ctr"/>
+          <a:lstStyle/>
+          <a:p>
+            <a:pPr indent="0" marL="0">
+              <a:buNone/>
+            </a:pPr>
+            <a:r>
+              <a:rPr lang="en-US" sz="1100" dirty="0">
+                <a:solidFill>
+                  <a:srgbClr val="6B6459"/>
+                </a:solidFill>
+                <a:latin typeface="Calibri" pitchFamily="34" charset="0"/>
+                <a:ea typeface="Calibri" pitchFamily="34" charset="-122"/>
+                <a:cs typeface="Calibri" pitchFamily="34" charset="-120"/>
+              </a:rPr>
+              <a:t>Oct–Dec 18</a:t>
+            </a:r>
+            <a:endParaRPr lang="en-US" sz="1100" dirty="0"/>
+          </a:p>
+        </p:txBody>
+      </p:sp>
+      <p:sp>
+        <p:nvSpPr>
+          <p:cNvPr id="23" name="Text 21"/>
+          <p:cNvSpPr txBox="1"/>
+          <p:nvPr/>
+        </p:nvSpPr>
+        <p:spPr>
+          <a:xfrm>
+            <a:off x="6197498" y="4572000"/>
+            <a:ext cx="1188720" cy="274320"/>
+          </a:xfrm>
+          <a:prstGeom prst="rect">
+            <a:avLst/>
+          </a:prstGeom>
+          <a:noFill/>
+          <a:ln/>
+        </p:spPr>
+        <p:txBody>
+          <a:bodyPr wrap="square" lIns="0" tIns="0" rIns="0" bIns="0" rtlCol="0" anchor="ctr"/>
+          <a:lstStyle/>
+          <a:p>
+            <a:pPr algn="r" indent="0" marL="0">
+              <a:buNone/>
+            </a:pPr>
+            <a:r>
+              <a:rPr lang="en-US" sz="1300" b="1" dirty="0">
+                <a:solidFill>
+                  <a:srgbClr val="8A6410"/>
+                </a:solidFill>
+                <a:latin typeface="Courier New" pitchFamily="34" charset="0"/>
+                <a:ea typeface="Courier New" pitchFamily="34" charset="-122"/>
+                <a:cs typeface="Courier New" pitchFamily="34" charset="-120"/>
+              </a:rPr>
+              <a:t>-1.8%</a:t>
+            </a:r>
+            <a:endParaRPr lang="en-US" sz="1300" dirty="0"/>
+          </a:p>
+        </p:txBody>
+      </p:sp>
+      <p:sp>
+        <p:nvSpPr>
+          <p:cNvPr id="24" name="Text 22"/>
+          <p:cNvSpPr txBox="1"/>
+          <p:nvPr/>
+        </p:nvSpPr>
+        <p:spPr>
+          <a:xfrm>
+            <a:off x="4643018" y="4828032"/>
+            <a:ext cx="2905658" cy="237744"/>
+          </a:xfrm>
+          <a:prstGeom prst="rect">
+            <a:avLst/>
+          </a:prstGeom>
+          <a:noFill/>
+          <a:ln/>
+        </p:spPr>
+        <p:txBody>
+          <a:bodyPr wrap="square" lIns="0" tIns="0" rIns="0" bIns="0" rtlCol="0" anchor="ctr"/>
+          <a:lstStyle/>
+          <a:p>
+            <a:pPr indent="0" marL="0">
+              <a:buNone/>
+            </a:pPr>
+            <a:r>
+              <a:rPr lang="en-US" sz="1050" i="1" dirty="0">
+                <a:solidFill>
+                  <a:srgbClr val="8A6410"/>
+                </a:solidFill>
+                <a:latin typeface="Calibri" pitchFamily="34" charset="0"/>
+                <a:ea typeface="Calibri" pitchFamily="34" charset="-122"/>
+                <a:cs typeface="Calibri" pitchFamily="34" charset="-120"/>
+              </a:rPr>
+              <a:t>we lose two of three</a:t>
+            </a:r>
+            <a:endParaRPr lang="en-US" sz="1050" dirty="0"/>
+          </a:p>
+        </p:txBody>
+      </p:sp>
+      <p:sp>
+        <p:nvSpPr>
+          <p:cNvPr id="25" name="Shape 23"/>
+          <p:cNvSpPr/>
+          <p:nvPr/>
+        </p:nvSpPr>
+        <p:spPr>
+          <a:xfrm>
+            <a:off x="8051597" y="2880360"/>
+            <a:ext cx="3362858" cy="2286000"/>
           </a:xfrm>
           <a:prstGeom prst="rect">
             <a:avLst/>
@@ -9821,14 +10524,429 @@
       </p:sp>
       <p:sp>
         <p:nvSpPr>
-          <p:cNvPr id="8" name="Text 5"/>
-          <p:cNvSpPr txBox="1"/>
-          <p:nvPr/>
-        </p:nvSpPr>
-        <p:spPr>
-          <a:xfrm>
-            <a:off x="8092440" y="5559552"/>
-            <a:ext cx="3154680" cy="658368"/>
+          <p:cNvPr id="26" name="Text 24"/>
+          <p:cNvSpPr txBox="1"/>
+          <p:nvPr/>
+        </p:nvSpPr>
+        <p:spPr>
+          <a:xfrm>
+            <a:off x="8280197" y="3035808"/>
+            <a:ext cx="2905658" cy="292608"/>
+          </a:xfrm>
+          <a:prstGeom prst="rect">
+            <a:avLst/>
+          </a:prstGeom>
+          <a:noFill/>
+          <a:ln/>
+        </p:spPr>
+        <p:txBody>
+          <a:bodyPr wrap="square" lIns="0" tIns="0" rIns="0" bIns="0" rtlCol="0" anchor="ctr"/>
+          <a:lstStyle/>
+          <a:p>
+            <a:pPr indent="0" marL="0">
+              <a:buNone/>
+            </a:pPr>
+            <a:r>
+              <a:rPr lang="en-US" sz="1350" b="1" dirty="0">
+                <a:solidFill>
+                  <a:srgbClr val="14110D"/>
+                </a:solidFill>
+                <a:latin typeface="Calibri" pitchFamily="34" charset="0"/>
+                <a:ea typeface="Calibri" pitchFamily="34" charset="-122"/>
+                <a:cs typeface="Calibri" pitchFamily="34" charset="-120"/>
+              </a:rPr>
+              <a:t>Our forecast, normal sizing</a:t>
+            </a:r>
+            <a:endParaRPr lang="en-US" sz="1350" dirty="0"/>
+          </a:p>
+        </p:txBody>
+      </p:sp>
+      <p:sp>
+        <p:nvSpPr>
+          <p:cNvPr id="27" name="Text 25"/>
+          <p:cNvSpPr txBox="1"/>
+          <p:nvPr/>
+        </p:nvSpPr>
+        <p:spPr>
+          <a:xfrm>
+            <a:off x="8280197" y="3319272"/>
+            <a:ext cx="2905658" cy="237744"/>
+          </a:xfrm>
+          <a:prstGeom prst="rect">
+            <a:avLst/>
+          </a:prstGeom>
+          <a:noFill/>
+          <a:ln/>
+        </p:spPr>
+        <p:txBody>
+          <a:bodyPr wrap="square" lIns="0" tIns="0" rIns="0" bIns="0" rtlCol="0" anchor="ctr"/>
+          <a:lstStyle/>
+          <a:p>
+            <a:pPr indent="0" marL="0">
+              <a:buNone/>
+            </a:pPr>
+            <a:r>
+              <a:rPr lang="en-US" sz="950" dirty="0">
+                <a:solidFill>
+                  <a:srgbClr val="1F5D42"/>
+                </a:solidFill>
+                <a:latin typeface="Courier New" pitchFamily="34" charset="0"/>
+                <a:ea typeface="Courier New" pitchFamily="34" charset="-122"/>
+                <a:cs typeface="Courier New" pitchFamily="34" charset="-120"/>
+              </a:rPr>
+              <a:t>the claim</a:t>
+            </a:r>
+            <a:endParaRPr lang="en-US" sz="950" dirty="0"/>
+          </a:p>
+        </p:txBody>
+      </p:sp>
+      <p:sp>
+        <p:nvSpPr>
+          <p:cNvPr id="28" name="Text 26"/>
+          <p:cNvSpPr txBox="1"/>
+          <p:nvPr/>
+        </p:nvSpPr>
+        <p:spPr>
+          <a:xfrm>
+            <a:off x="8280197" y="3657600"/>
+            <a:ext cx="1554480" cy="274320"/>
+          </a:xfrm>
+          <a:prstGeom prst="rect">
+            <a:avLst/>
+          </a:prstGeom>
+          <a:noFill/>
+          <a:ln/>
+        </p:spPr>
+        <p:txBody>
+          <a:bodyPr wrap="square" lIns="0" tIns="0" rIns="0" bIns="0" rtlCol="0" anchor="ctr"/>
+          <a:lstStyle/>
+          <a:p>
+            <a:pPr indent="0" marL="0">
+              <a:buNone/>
+            </a:pPr>
+            <a:r>
+              <a:rPr lang="en-US" sz="1100" dirty="0">
+                <a:solidFill>
+                  <a:srgbClr val="6B6459"/>
+                </a:solidFill>
+                <a:latin typeface="Calibri" pitchFamily="34" charset="0"/>
+                <a:ea typeface="Calibri" pitchFamily="34" charset="-122"/>
+                <a:cs typeface="Calibri" pitchFamily="34" charset="-120"/>
+              </a:rPr>
+              <a:t>Jan–Mar 19</a:t>
+            </a:r>
+            <a:endParaRPr lang="en-US" sz="1100" dirty="0"/>
+          </a:p>
+        </p:txBody>
+      </p:sp>
+      <p:sp>
+        <p:nvSpPr>
+          <p:cNvPr id="29" name="Text 27"/>
+          <p:cNvSpPr txBox="1"/>
+          <p:nvPr/>
+        </p:nvSpPr>
+        <p:spPr>
+          <a:xfrm>
+            <a:off x="9834677" y="3657600"/>
+            <a:ext cx="1188720" cy="274320"/>
+          </a:xfrm>
+          <a:prstGeom prst="rect">
+            <a:avLst/>
+          </a:prstGeom>
+          <a:noFill/>
+          <a:ln/>
+        </p:spPr>
+        <p:txBody>
+          <a:bodyPr wrap="square" lIns="0" tIns="0" rIns="0" bIns="0" rtlCol="0" anchor="ctr"/>
+          <a:lstStyle/>
+          <a:p>
+            <a:pPr algn="r" indent="0" marL="0">
+              <a:buNone/>
+            </a:pPr>
+            <a:r>
+              <a:rPr lang="en-US" sz="1300" b="1" dirty="0">
+                <a:solidFill>
+                  <a:srgbClr val="1F5D42"/>
+                </a:solidFill>
+                <a:latin typeface="Courier New" pitchFamily="34" charset="0"/>
+                <a:ea typeface="Courier New" pitchFamily="34" charset="-122"/>
+                <a:cs typeface="Courier New" pitchFamily="34" charset="-120"/>
+              </a:rPr>
+              <a:t>+17.9%</a:t>
+            </a:r>
+            <a:endParaRPr lang="en-US" sz="1300" dirty="0"/>
+          </a:p>
+        </p:txBody>
+      </p:sp>
+      <p:sp>
+        <p:nvSpPr>
+          <p:cNvPr id="30" name="Text 28"/>
+          <p:cNvSpPr txBox="1"/>
+          <p:nvPr/>
+        </p:nvSpPr>
+        <p:spPr>
+          <a:xfrm>
+            <a:off x="8280197" y="4114800"/>
+            <a:ext cx="1554480" cy="274320"/>
+          </a:xfrm>
+          <a:prstGeom prst="rect">
+            <a:avLst/>
+          </a:prstGeom>
+          <a:noFill/>
+          <a:ln/>
+        </p:spPr>
+        <p:txBody>
+          <a:bodyPr wrap="square" lIns="0" tIns="0" rIns="0" bIns="0" rtlCol="0" anchor="ctr"/>
+          <a:lstStyle/>
+          <a:p>
+            <a:pPr indent="0" marL="0">
+              <a:buNone/>
+            </a:pPr>
+            <a:r>
+              <a:rPr lang="en-US" sz="1100" dirty="0">
+                <a:solidFill>
+                  <a:srgbClr val="6B6459"/>
+                </a:solidFill>
+                <a:latin typeface="Calibri" pitchFamily="34" charset="0"/>
+                <a:ea typeface="Calibri" pitchFamily="34" charset="-122"/>
+                <a:cs typeface="Calibri" pitchFamily="34" charset="-120"/>
+              </a:rPr>
+              <a:t>Apr–Jun 19</a:t>
+            </a:r>
+            <a:endParaRPr lang="en-US" sz="1100" dirty="0"/>
+          </a:p>
+        </p:txBody>
+      </p:sp>
+      <p:sp>
+        <p:nvSpPr>
+          <p:cNvPr id="31" name="Text 29"/>
+          <p:cNvSpPr txBox="1"/>
+          <p:nvPr/>
+        </p:nvSpPr>
+        <p:spPr>
+          <a:xfrm>
+            <a:off x="9834677" y="4114800"/>
+            <a:ext cx="1188720" cy="274320"/>
+          </a:xfrm>
+          <a:prstGeom prst="rect">
+            <a:avLst/>
+          </a:prstGeom>
+          <a:noFill/>
+          <a:ln/>
+        </p:spPr>
+        <p:txBody>
+          <a:bodyPr wrap="square" lIns="0" tIns="0" rIns="0" bIns="0" rtlCol="0" anchor="ctr"/>
+          <a:lstStyle/>
+          <a:p>
+            <a:pPr algn="r" indent="0" marL="0">
+              <a:buNone/>
+            </a:pPr>
+            <a:r>
+              <a:rPr lang="en-US" sz="1300" b="1" dirty="0">
+                <a:solidFill>
+                  <a:srgbClr val="1F5D42"/>
+                </a:solidFill>
+                <a:latin typeface="Courier New" pitchFamily="34" charset="0"/>
+                <a:ea typeface="Courier New" pitchFamily="34" charset="-122"/>
+                <a:cs typeface="Courier New" pitchFamily="34" charset="-120"/>
+              </a:rPr>
+              <a:t>+8.1%</a:t>
+            </a:r>
+            <a:endParaRPr lang="en-US" sz="1300" dirty="0"/>
+          </a:p>
+        </p:txBody>
+      </p:sp>
+      <p:sp>
+        <p:nvSpPr>
+          <p:cNvPr id="32" name="Text 30"/>
+          <p:cNvSpPr txBox="1"/>
+          <p:nvPr/>
+        </p:nvSpPr>
+        <p:spPr>
+          <a:xfrm>
+            <a:off x="8280197" y="4572000"/>
+            <a:ext cx="1554480" cy="274320"/>
+          </a:xfrm>
+          <a:prstGeom prst="rect">
+            <a:avLst/>
+          </a:prstGeom>
+          <a:noFill/>
+          <a:ln/>
+        </p:spPr>
+        <p:txBody>
+          <a:bodyPr wrap="square" lIns="0" tIns="0" rIns="0" bIns="0" rtlCol="0" anchor="ctr"/>
+          <a:lstStyle/>
+          <a:p>
+            <a:pPr indent="0" marL="0">
+              <a:buNone/>
+            </a:pPr>
+            <a:r>
+              <a:rPr lang="en-US" sz="1100" dirty="0">
+                <a:solidFill>
+                  <a:srgbClr val="6B6459"/>
+                </a:solidFill>
+                <a:latin typeface="Calibri" pitchFamily="34" charset="0"/>
+                <a:ea typeface="Calibri" pitchFamily="34" charset="-122"/>
+                <a:cs typeface="Calibri" pitchFamily="34" charset="-120"/>
+              </a:rPr>
+              <a:t>Oct–Dec 18</a:t>
+            </a:r>
+            <a:endParaRPr lang="en-US" sz="1100" dirty="0"/>
+          </a:p>
+        </p:txBody>
+      </p:sp>
+      <p:sp>
+        <p:nvSpPr>
+          <p:cNvPr id="33" name="Text 31"/>
+          <p:cNvSpPr txBox="1"/>
+          <p:nvPr/>
+        </p:nvSpPr>
+        <p:spPr>
+          <a:xfrm>
+            <a:off x="9834677" y="4572000"/>
+            <a:ext cx="1188720" cy="274320"/>
+          </a:xfrm>
+          <a:prstGeom prst="rect">
+            <a:avLst/>
+          </a:prstGeom>
+          <a:noFill/>
+          <a:ln/>
+        </p:spPr>
+        <p:txBody>
+          <a:bodyPr wrap="square" lIns="0" tIns="0" rIns="0" bIns="0" rtlCol="0" anchor="ctr"/>
+          <a:lstStyle/>
+          <a:p>
+            <a:pPr algn="r" indent="0" marL="0">
+              <a:buNone/>
+            </a:pPr>
+            <a:r>
+              <a:rPr lang="en-US" sz="1300" b="1" dirty="0">
+                <a:solidFill>
+                  <a:srgbClr val="1F5D42"/>
+                </a:solidFill>
+                <a:latin typeface="Courier New" pitchFamily="34" charset="0"/>
+                <a:ea typeface="Courier New" pitchFamily="34" charset="-122"/>
+                <a:cs typeface="Courier New" pitchFamily="34" charset="-120"/>
+              </a:rPr>
+              <a:t>+0.4%</a:t>
+            </a:r>
+            <a:endParaRPr lang="en-US" sz="1300" dirty="0"/>
+          </a:p>
+        </p:txBody>
+      </p:sp>
+      <p:sp>
+        <p:nvSpPr>
+          <p:cNvPr id="34" name="Text 32"/>
+          <p:cNvSpPr txBox="1"/>
+          <p:nvPr/>
+        </p:nvSpPr>
+        <p:spPr>
+          <a:xfrm>
+            <a:off x="8280197" y="4828032"/>
+            <a:ext cx="2905658" cy="237744"/>
+          </a:xfrm>
+          <a:prstGeom prst="rect">
+            <a:avLst/>
+          </a:prstGeom>
+          <a:noFill/>
+          <a:ln/>
+        </p:spPr>
+        <p:txBody>
+          <a:bodyPr wrap="square" lIns="0" tIns="0" rIns="0" bIns="0" rtlCol="0" anchor="ctr"/>
+          <a:lstStyle/>
+          <a:p>
+            <a:pPr indent="0" marL="0">
+              <a:buNone/>
+            </a:pPr>
+            <a:r>
+              <a:rPr lang="en-US" sz="1050" i="1" dirty="0">
+                <a:solidFill>
+                  <a:srgbClr val="1F5D42"/>
+                </a:solidFill>
+                <a:latin typeface="Calibri" pitchFamily="34" charset="0"/>
+                <a:ea typeface="Calibri" pitchFamily="34" charset="-122"/>
+                <a:cs typeface="Calibri" pitchFamily="34" charset="-120"/>
+              </a:rPr>
+              <a:t>we win all three</a:t>
+            </a:r>
+            <a:endParaRPr lang="en-US" sz="1050" dirty="0"/>
+          </a:p>
+        </p:txBody>
+      </p:sp>
+      <p:sp>
+        <p:nvSpPr>
+          <p:cNvPr id="35" name="Shape 33"/>
+          <p:cNvSpPr/>
+          <p:nvPr/>
+        </p:nvSpPr>
+        <p:spPr>
+          <a:xfrm>
+            <a:off x="777240" y="5349240"/>
+            <a:ext cx="10637215" cy="1005840"/>
+          </a:xfrm>
+          <a:prstGeom prst="rect">
+            <a:avLst/>
+          </a:prstGeom>
+          <a:solidFill>
+            <a:srgbClr val="EFEBE2"/>
+          </a:solidFill>
+          <a:ln w="12700">
+            <a:solidFill>
+              <a:srgbClr val="14110D"/>
+            </a:solidFill>
+            <a:prstDash val="solid"/>
+          </a:ln>
+        </p:spPr>
+      </p:sp>
+      <p:sp>
+        <p:nvSpPr>
+          <p:cNvPr id="36" name="Text 34"/>
+          <p:cNvSpPr txBox="1"/>
+          <p:nvPr/>
+        </p:nvSpPr>
+        <p:spPr>
+          <a:xfrm>
+            <a:off x="1051560" y="5468112"/>
+            <a:ext cx="3840480" cy="256032"/>
+          </a:xfrm>
+          <a:prstGeom prst="rect">
+            <a:avLst/>
+          </a:prstGeom>
+          <a:noFill/>
+          <a:ln/>
+        </p:spPr>
+        <p:txBody>
+          <a:bodyPr wrap="square" lIns="0" tIns="0" rIns="0" bIns="0" rtlCol="0" anchor="ctr"/>
+          <a:lstStyle/>
+          <a:p>
+            <a:pPr indent="0" marL="0">
+              <a:buNone/>
+            </a:pPr>
+            <a:r>
+              <a:rPr lang="en-US" sz="1200" b="1" dirty="0">
+                <a:solidFill>
+                  <a:srgbClr val="14110D"/>
+                </a:solidFill>
+                <a:latin typeface="Calibri" pitchFamily="34" charset="0"/>
+                <a:ea typeface="Calibri" pitchFamily="34" charset="-122"/>
+                <a:cs typeface="Calibri" pitchFamily="34" charset="-120"/>
+              </a:rPr>
+              <a:t>What this says, and what it does not</a:t>
+            </a:r>
+            <a:endParaRPr lang="en-US" sz="1200" dirty="0"/>
+          </a:p>
+        </p:txBody>
+      </p:sp>
+      <p:sp>
+        <p:nvSpPr>
+          <p:cNvPr id="37" name="Text 35"/>
+          <p:cNvSpPr txBox="1"/>
+          <p:nvPr/>
+        </p:nvSpPr>
+        <p:spPr>
+          <a:xfrm>
+            <a:off x="4937760" y="5440680"/>
+            <a:ext cx="6263640" cy="822960"/>
           </a:xfrm>
           <a:prstGeom prst="rect">
             <a:avLst/>
@@ -9842,22 +10960,22 @@
           <a:p>
             <a:pPr indent="0" marL="0">
               <a:lnSpc>
-                <a:spcPts val="1500"/>
+                <a:spcPts val="1350"/>
               </a:lnSpc>
               <a:buNone/>
             </a:pPr>
             <a:r>
-              <a:rPr lang="en-US" sz="1100" dirty="0">
-                <a:solidFill>
-                  <a:srgbClr val="14110D"/>
-                </a:solidFill>
-                <a:latin typeface="Calibri" pitchFamily="34" charset="0"/>
-                <a:ea typeface="Calibri" pitchFamily="34" charset="-122"/>
-                <a:cs typeface="Calibri" pitchFamily="34" charset="-120"/>
-              </a:rPr>
-              <a:t>We hold more stock and pay more holding cost. The saving is entirely fewer lost sales — and a test asserts exactly that.</a:t>
-            </a:r>
-            <a:endParaRPr lang="en-US" sz="1100" dirty="0"/>
+              <a:rPr lang="en-US" sz="1050" dirty="0">
+                <a:solidFill>
+                  <a:srgbClr val="3B362F"/>
+                </a:solidFill>
+                <a:latin typeface="Calibri" pitchFamily="34" charset="0"/>
+                <a:ea typeface="Calibri" pitchFamily="34" charset="-122"/>
+                <a:cs typeface="Calibri" pitchFamily="34" charset="-120"/>
+              </a:rPr>
+              <a:t>We beat the normal approximation on every window with forecast quality held constant — so the distribution is earning its place. Against a well-tuned ERP policy we are level, winning one and losing two by a couple of percent, and we say so. What separates us there is not cost: it is that z comes from the pharmacy's own margins instead of a consultant, the interval behind it is calibrated, and the number explains itself.</a:t>
+            </a:r>
+            <a:endParaRPr lang="en-US" sz="1050" dirty="0"/>
           </a:p>
         </p:txBody>
       </p:sp>
